--- a/assets/powerpoints/module-travail/E2-je-retiens-des-mots.pptx
+++ b/assets/powerpoints/module-travail/E2-je-retiens-des-mots.pptx
@@ -4436,7 +4436,7 @@
                 </a:solidFill>
                 <a:latin typeface="Verdana"/>
               </a:rPr>
-              <a:t>SÉANCE E2  ·  MODULE 3</a:t>
+              <a:t>SÉANCE E2  ·  MODULE 4</a:t>
             </a:r>
           </a:p>
         </p:txBody>

--- a/assets/powerpoints/module-travail/E2-je-retiens-des-mots.pptx
+++ b/assets/powerpoints/module-travail/E2-je-retiens-des-mots.pptx
@@ -4432,7 +4432,7 @@
             <a:r>
               <a:rPr sz="1300" b="1" i="0" spc="156">
                 <a:solidFill>
-                  <a:srgbClr val="166534"/>
+                  <a:srgbClr val="A5335F"/>
                 </a:solidFill>
                 <a:latin typeface="Verdana"/>
               </a:rPr>
@@ -4772,7 +4772,7 @@
             <a:r>
               <a:rPr sz="1300" b="1" i="0" spc="156">
                 <a:solidFill>
-                  <a:srgbClr val="166534"/>
+                  <a:srgbClr val="A5335F"/>
                 </a:solidFill>
                 <a:latin typeface="Verdana"/>
               </a:rPr>
@@ -4922,7 +4922,7 @@
             </a:avLst>
           </a:prstGeom>
           <a:solidFill>
-            <a:srgbClr val="E3F1E7"/>
+            <a:srgbClr val="FCE9F0"/>
           </a:solidFill>
           <a:ln>
             <a:noFill/>
@@ -4979,7 +4979,7 @@
             <a:r>
               <a:rPr sz="1500" b="1" i="0">
                 <a:solidFill>
-                  <a:srgbClr val="166534"/>
+                  <a:srgbClr val="A5335F"/>
                 </a:solidFill>
                 <a:latin typeface="Verdana"/>
               </a:rPr>
@@ -5099,7 +5099,7 @@
             </a:avLst>
           </a:prstGeom>
           <a:solidFill>
-            <a:srgbClr val="E3F1E7"/>
+            <a:srgbClr val="FCE9F0"/>
           </a:solidFill>
           <a:ln>
             <a:noFill/>
@@ -5156,7 +5156,7 @@
             <a:r>
               <a:rPr sz="1500" b="1" i="0">
                 <a:solidFill>
-                  <a:srgbClr val="166534"/>
+                  <a:srgbClr val="A5335F"/>
                 </a:solidFill>
                 <a:latin typeface="Verdana"/>
               </a:rPr>
@@ -5276,7 +5276,7 @@
             </a:avLst>
           </a:prstGeom>
           <a:solidFill>
-            <a:srgbClr val="E3F1E7"/>
+            <a:srgbClr val="FCE9F0"/>
           </a:solidFill>
           <a:ln>
             <a:noFill/>
@@ -5333,7 +5333,7 @@
             <a:r>
               <a:rPr sz="1500" b="1" i="0">
                 <a:solidFill>
-                  <a:srgbClr val="166534"/>
+                  <a:srgbClr val="A5335F"/>
                 </a:solidFill>
                 <a:latin typeface="Verdana"/>
               </a:rPr>
@@ -5453,7 +5453,7 @@
             </a:avLst>
           </a:prstGeom>
           <a:solidFill>
-            <a:srgbClr val="E3F1E7"/>
+            <a:srgbClr val="FCE9F0"/>
           </a:solidFill>
           <a:ln>
             <a:noFill/>
@@ -5510,7 +5510,7 @@
             <a:r>
               <a:rPr sz="1500" b="1" i="0">
                 <a:solidFill>
-                  <a:srgbClr val="166534"/>
+                  <a:srgbClr val="A5335F"/>
                 </a:solidFill>
                 <a:latin typeface="Verdana"/>
               </a:rPr>
@@ -5630,7 +5630,7 @@
             </a:avLst>
           </a:prstGeom>
           <a:solidFill>
-            <a:srgbClr val="E3F1E7"/>
+            <a:srgbClr val="FCE9F0"/>
           </a:solidFill>
           <a:ln>
             <a:noFill/>
@@ -5687,7 +5687,7 @@
             <a:r>
               <a:rPr sz="1500" b="1" i="0">
                 <a:solidFill>
-                  <a:srgbClr val="166534"/>
+                  <a:srgbClr val="A5335F"/>
                 </a:solidFill>
                 <a:latin typeface="Verdana"/>
               </a:rPr>
@@ -5807,7 +5807,7 @@
             </a:avLst>
           </a:prstGeom>
           <a:solidFill>
-            <a:srgbClr val="E3F1E7"/>
+            <a:srgbClr val="FCE9F0"/>
           </a:solidFill>
           <a:ln>
             <a:noFill/>
@@ -5864,7 +5864,7 @@
             <a:r>
               <a:rPr sz="1500" b="1" i="0">
                 <a:solidFill>
-                  <a:srgbClr val="166534"/>
+                  <a:srgbClr val="A5335F"/>
                 </a:solidFill>
                 <a:latin typeface="Verdana"/>
               </a:rPr>
@@ -6089,7 +6089,7 @@
             <a:r>
               <a:rPr sz="1300" b="1" i="0" spc="156">
                 <a:solidFill>
-                  <a:srgbClr val="166534"/>
+                  <a:srgbClr val="A5335F"/>
                 </a:solidFill>
                 <a:latin typeface="Verdana"/>
               </a:rPr>
@@ -6239,7 +6239,7 @@
             </a:avLst>
           </a:prstGeom>
           <a:solidFill>
-            <a:srgbClr val="E3F1E7"/>
+            <a:srgbClr val="FCE9F0"/>
           </a:solidFill>
           <a:ln>
             <a:noFill/>
@@ -6296,7 +6296,7 @@
             <a:r>
               <a:rPr sz="1500" b="1" i="0">
                 <a:solidFill>
-                  <a:srgbClr val="166534"/>
+                  <a:srgbClr val="A5335F"/>
                 </a:solidFill>
                 <a:latin typeface="Verdana"/>
               </a:rPr>
@@ -6407,7 +6407,7 @@
             </a:avLst>
           </a:prstGeom>
           <a:solidFill>
-            <a:srgbClr val="E3F1E7"/>
+            <a:srgbClr val="FCE9F0"/>
           </a:solidFill>
           <a:ln>
             <a:noFill/>
@@ -6464,7 +6464,7 @@
             <a:r>
               <a:rPr sz="1500" b="1" i="0">
                 <a:solidFill>
-                  <a:srgbClr val="166534"/>
+                  <a:srgbClr val="A5335F"/>
                 </a:solidFill>
                 <a:latin typeface="Verdana"/>
               </a:rPr>
@@ -6575,7 +6575,7 @@
             </a:avLst>
           </a:prstGeom>
           <a:solidFill>
-            <a:srgbClr val="E3F1E7"/>
+            <a:srgbClr val="FCE9F0"/>
           </a:solidFill>
           <a:ln>
             <a:noFill/>
@@ -6632,7 +6632,7 @@
             <a:r>
               <a:rPr sz="1500" b="1" i="0">
                 <a:solidFill>
-                  <a:srgbClr val="166534"/>
+                  <a:srgbClr val="A5335F"/>
                 </a:solidFill>
                 <a:latin typeface="Verdana"/>
               </a:rPr>
@@ -6743,7 +6743,7 @@
             </a:avLst>
           </a:prstGeom>
           <a:solidFill>
-            <a:srgbClr val="E3F1E7"/>
+            <a:srgbClr val="FCE9F0"/>
           </a:solidFill>
           <a:ln>
             <a:noFill/>
@@ -6800,7 +6800,7 @@
             <a:r>
               <a:rPr sz="1500" b="1" i="0">
                 <a:solidFill>
-                  <a:srgbClr val="166534"/>
+                  <a:srgbClr val="A5335F"/>
                 </a:solidFill>
                 <a:latin typeface="Verdana"/>
               </a:rPr>
@@ -6911,7 +6911,7 @@
             </a:avLst>
           </a:prstGeom>
           <a:solidFill>
-            <a:srgbClr val="E3F1E7"/>
+            <a:srgbClr val="FCE9F0"/>
           </a:solidFill>
           <a:ln>
             <a:noFill/>
@@ -6968,7 +6968,7 @@
             <a:r>
               <a:rPr sz="1500" b="1" i="0">
                 <a:solidFill>
-                  <a:srgbClr val="166534"/>
+                  <a:srgbClr val="A5335F"/>
                 </a:solidFill>
                 <a:latin typeface="Verdana"/>
               </a:rPr>
@@ -7079,7 +7079,7 @@
             </a:avLst>
           </a:prstGeom>
           <a:solidFill>
-            <a:srgbClr val="E3F1E7"/>
+            <a:srgbClr val="FCE9F0"/>
           </a:solidFill>
           <a:ln>
             <a:noFill/>
@@ -7136,7 +7136,7 @@
             <a:r>
               <a:rPr sz="1500" b="1" i="0">
                 <a:solidFill>
-                  <a:srgbClr val="166534"/>
+                  <a:srgbClr val="A5335F"/>
                 </a:solidFill>
                 <a:latin typeface="Verdana"/>
               </a:rPr>
@@ -7352,7 +7352,7 @@
             <a:r>
               <a:rPr sz="1300" b="1" i="0" spc="156">
                 <a:solidFill>
-                  <a:srgbClr val="166534"/>
+                  <a:srgbClr val="A5335F"/>
                 </a:solidFill>
                 <a:latin typeface="Verdana"/>
               </a:rPr>
@@ -7502,7 +7502,7 @@
             </a:avLst>
           </a:prstGeom>
           <a:solidFill>
-            <a:srgbClr val="E3F1E7"/>
+            <a:srgbClr val="FCE9F0"/>
           </a:solidFill>
           <a:ln>
             <a:noFill/>
@@ -7559,7 +7559,7 @@
             <a:r>
               <a:rPr sz="1500" b="1" i="0">
                 <a:solidFill>
-                  <a:srgbClr val="166534"/>
+                  <a:srgbClr val="A5335F"/>
                 </a:solidFill>
                 <a:latin typeface="Verdana"/>
               </a:rPr>
@@ -7679,7 +7679,7 @@
             </a:avLst>
           </a:prstGeom>
           <a:solidFill>
-            <a:srgbClr val="E3F1E7"/>
+            <a:srgbClr val="FCE9F0"/>
           </a:solidFill>
           <a:ln>
             <a:noFill/>
@@ -7736,7 +7736,7 @@
             <a:r>
               <a:rPr sz="1500" b="1" i="0">
                 <a:solidFill>
-                  <a:srgbClr val="166534"/>
+                  <a:srgbClr val="A5335F"/>
                 </a:solidFill>
                 <a:latin typeface="Verdana"/>
               </a:rPr>
@@ -7856,7 +7856,7 @@
             </a:avLst>
           </a:prstGeom>
           <a:solidFill>
-            <a:srgbClr val="E3F1E7"/>
+            <a:srgbClr val="FCE9F0"/>
           </a:solidFill>
           <a:ln>
             <a:noFill/>
@@ -7913,7 +7913,7 @@
             <a:r>
               <a:rPr sz="1500" b="1" i="0">
                 <a:solidFill>
-                  <a:srgbClr val="166534"/>
+                  <a:srgbClr val="A5335F"/>
                 </a:solidFill>
                 <a:latin typeface="Verdana"/>
               </a:rPr>
@@ -8033,7 +8033,7 @@
             </a:avLst>
           </a:prstGeom>
           <a:solidFill>
-            <a:srgbClr val="E3F1E7"/>
+            <a:srgbClr val="FCE9F0"/>
           </a:solidFill>
           <a:ln>
             <a:noFill/>
@@ -8090,7 +8090,7 @@
             <a:r>
               <a:rPr sz="1500" b="1" i="0">
                 <a:solidFill>
-                  <a:srgbClr val="166534"/>
+                  <a:srgbClr val="A5335F"/>
                 </a:solidFill>
                 <a:latin typeface="Verdana"/>
               </a:rPr>
@@ -8210,7 +8210,7 @@
             </a:avLst>
           </a:prstGeom>
           <a:solidFill>
-            <a:srgbClr val="E3F1E7"/>
+            <a:srgbClr val="FCE9F0"/>
           </a:solidFill>
           <a:ln>
             <a:noFill/>
@@ -8267,7 +8267,7 @@
             <a:r>
               <a:rPr sz="1500" b="1" i="0">
                 <a:solidFill>
-                  <a:srgbClr val="166534"/>
+                  <a:srgbClr val="A5335F"/>
                 </a:solidFill>
                 <a:latin typeface="Verdana"/>
               </a:rPr>
@@ -8387,7 +8387,7 @@
             </a:avLst>
           </a:prstGeom>
           <a:solidFill>
-            <a:srgbClr val="E3F1E7"/>
+            <a:srgbClr val="FCE9F0"/>
           </a:solidFill>
           <a:ln>
             <a:noFill/>
@@ -8444,7 +8444,7 @@
             <a:r>
               <a:rPr sz="1500" b="1" i="0">
                 <a:solidFill>
-                  <a:srgbClr val="166534"/>
+                  <a:srgbClr val="A5335F"/>
                 </a:solidFill>
                 <a:latin typeface="Verdana"/>
               </a:rPr>
@@ -9132,7 +9132,7 @@
             <a:r>
               <a:rPr sz="1300" b="1" i="0" spc="156">
                 <a:solidFill>
-                  <a:srgbClr val="166534"/>
+                  <a:srgbClr val="A5335F"/>
                 </a:solidFill>
                 <a:latin typeface="Verdana"/>
               </a:rPr>
@@ -9243,7 +9243,7 @@
             </a:avLst>
           </a:prstGeom>
           <a:solidFill>
-            <a:srgbClr val="E3F1E7"/>
+            <a:srgbClr val="FCE9F0"/>
           </a:solidFill>
           <a:ln>
             <a:noFill/>
@@ -9300,7 +9300,7 @@
             <a:r>
               <a:rPr sz="1500" b="1" i="0">
                 <a:solidFill>
-                  <a:srgbClr val="166534"/>
+                  <a:srgbClr val="A5335F"/>
                 </a:solidFill>
                 <a:latin typeface="Verdana"/>
               </a:rPr>
@@ -9411,7 +9411,7 @@
             </a:avLst>
           </a:prstGeom>
           <a:solidFill>
-            <a:srgbClr val="E3F1E7"/>
+            <a:srgbClr val="FCE9F0"/>
           </a:solidFill>
           <a:ln>
             <a:noFill/>
@@ -9468,7 +9468,7 @@
             <a:r>
               <a:rPr sz="1500" b="1" i="0">
                 <a:solidFill>
-                  <a:srgbClr val="166534"/>
+                  <a:srgbClr val="A5335F"/>
                 </a:solidFill>
                 <a:latin typeface="Verdana"/>
               </a:rPr>
@@ -9579,7 +9579,7 @@
             </a:avLst>
           </a:prstGeom>
           <a:solidFill>
-            <a:srgbClr val="E3F1E7"/>
+            <a:srgbClr val="FCE9F0"/>
           </a:solidFill>
           <a:ln>
             <a:noFill/>
@@ -9636,7 +9636,7 @@
             <a:r>
               <a:rPr sz="1500" b="1" i="0">
                 <a:solidFill>
-                  <a:srgbClr val="166534"/>
+                  <a:srgbClr val="A5335F"/>
                 </a:solidFill>
                 <a:latin typeface="Verdana"/>
               </a:rPr>
@@ -9747,7 +9747,7 @@
             </a:avLst>
           </a:prstGeom>
           <a:solidFill>
-            <a:srgbClr val="E3F1E7"/>
+            <a:srgbClr val="FCE9F0"/>
           </a:solidFill>
           <a:ln>
             <a:noFill/>
@@ -9804,7 +9804,7 @@
             <a:r>
               <a:rPr sz="1500" b="1" i="0">
                 <a:solidFill>
-                  <a:srgbClr val="166534"/>
+                  <a:srgbClr val="A5335F"/>
                 </a:solidFill>
                 <a:latin typeface="Verdana"/>
               </a:rPr>
@@ -10020,7 +10020,7 @@
             <a:r>
               <a:rPr sz="1300" b="1" i="0" spc="156">
                 <a:solidFill>
-                  <a:srgbClr val="166534"/>
+                  <a:srgbClr val="A5335F"/>
                 </a:solidFill>
                 <a:latin typeface="Verdana"/>
               </a:rPr>
@@ -10960,7 +10960,7 @@
             <a:r>
               <a:rPr sz="1300" b="1" i="0" spc="156">
                 <a:solidFill>
-                  <a:srgbClr val="166534"/>
+                  <a:srgbClr val="A5335F"/>
                 </a:solidFill>
                 <a:latin typeface="Verdana"/>
               </a:rPr>
@@ -11780,7 +11780,7 @@
             <a:r>
               <a:rPr sz="1300" b="1" i="0" spc="156">
                 <a:solidFill>
-                  <a:srgbClr val="166534"/>
+                  <a:srgbClr val="A5335F"/>
                 </a:solidFill>
                 <a:latin typeface="Verdana"/>
               </a:rPr>
@@ -12720,7 +12720,7 @@
             <a:r>
               <a:rPr sz="1300" b="1" i="0" spc="156">
                 <a:solidFill>
-                  <a:srgbClr val="166534"/>
+                  <a:srgbClr val="A5335F"/>
                 </a:solidFill>
                 <a:latin typeface="Verdana"/>
               </a:rPr>
@@ -12961,7 +12961,7 @@
             <a:r>
               <a:rPr sz="1600" b="1" i="0">
                 <a:solidFill>
-                  <a:srgbClr val="166534"/>
+                  <a:srgbClr val="A5335F"/>
                 </a:solidFill>
                 <a:latin typeface="Verdana"/>
               </a:rPr>
@@ -13120,7 +13120,7 @@
             <a:r>
               <a:rPr sz="1600" b="1" i="0">
                 <a:solidFill>
-                  <a:srgbClr val="166534"/>
+                  <a:srgbClr val="A5335F"/>
                 </a:solidFill>
                 <a:latin typeface="Verdana"/>
               </a:rPr>
@@ -13279,7 +13279,7 @@
             <a:r>
               <a:rPr sz="1600" b="1" i="0">
                 <a:solidFill>
-                  <a:srgbClr val="166534"/>
+                  <a:srgbClr val="A5335F"/>
                 </a:solidFill>
                 <a:latin typeface="Verdana"/>
               </a:rPr>
@@ -13438,7 +13438,7 @@
             <a:r>
               <a:rPr sz="1600" b="1" i="0">
                 <a:solidFill>
-                  <a:srgbClr val="166534"/>
+                  <a:srgbClr val="A5335F"/>
                 </a:solidFill>
                 <a:latin typeface="Verdana"/>
               </a:rPr>
@@ -13597,7 +13597,7 @@
             <a:r>
               <a:rPr sz="1600" b="1" i="0">
                 <a:solidFill>
-                  <a:srgbClr val="166534"/>
+                  <a:srgbClr val="A5335F"/>
                 </a:solidFill>
                 <a:latin typeface="Verdana"/>
               </a:rPr>
@@ -13852,7 +13852,7 @@
             <a:r>
               <a:rPr sz="1300" b="1" i="0" spc="156">
                 <a:solidFill>
-                  <a:srgbClr val="166534"/>
+                  <a:srgbClr val="A5335F"/>
                 </a:solidFill>
                 <a:latin typeface="Verdana"/>
               </a:rPr>
@@ -14093,7 +14093,7 @@
             <a:r>
               <a:rPr sz="1800" b="1" i="0">
                 <a:solidFill>
-                  <a:srgbClr val="166534"/>
+                  <a:srgbClr val="A5335F"/>
                 </a:solidFill>
                 <a:latin typeface="Verdana"/>
               </a:rPr>
@@ -14252,7 +14252,7 @@
             <a:r>
               <a:rPr sz="1800" b="1" i="0">
                 <a:solidFill>
-                  <a:srgbClr val="166534"/>
+                  <a:srgbClr val="A5335F"/>
                 </a:solidFill>
                 <a:latin typeface="Verdana"/>
               </a:rPr>
@@ -14411,7 +14411,7 @@
             <a:r>
               <a:rPr sz="1800" b="1" i="0">
                 <a:solidFill>
-                  <a:srgbClr val="166534"/>
+                  <a:srgbClr val="A5335F"/>
                 </a:solidFill>
                 <a:latin typeface="Verdana"/>
               </a:rPr>
@@ -14570,7 +14570,7 @@
             <a:r>
               <a:rPr sz="1800" b="1" i="0">
                 <a:solidFill>
-                  <a:srgbClr val="166534"/>
+                  <a:srgbClr val="A5335F"/>
                 </a:solidFill>
                 <a:latin typeface="Verdana"/>
               </a:rPr>
@@ -14910,7 +14910,7 @@
             <a:r>
               <a:rPr sz="1300" b="1" i="0" spc="156">
                 <a:solidFill>
-                  <a:srgbClr val="166534"/>
+                  <a:srgbClr val="A5335F"/>
                 </a:solidFill>
                 <a:latin typeface="Verdana"/>
               </a:rPr>
@@ -15034,7 +15034,7 @@
             <a:r>
               <a:rPr sz="2000" b="1" i="0">
                 <a:solidFill>
-                  <a:srgbClr val="166534"/>
+                  <a:srgbClr val="A5335F"/>
                 </a:solidFill>
                 <a:latin typeface="Verdana"/>
               </a:rPr>
@@ -15158,7 +15158,7 @@
             <a:r>
               <a:rPr sz="2000" b="1" i="0">
                 <a:solidFill>
-                  <a:srgbClr val="166534"/>
+                  <a:srgbClr val="A5335F"/>
                 </a:solidFill>
                 <a:latin typeface="Verdana"/>
               </a:rPr>
@@ -15282,7 +15282,7 @@
             <a:r>
               <a:rPr sz="2000" b="1" i="0">
                 <a:solidFill>
-                  <a:srgbClr val="166534"/>
+                  <a:srgbClr val="A5335F"/>
                 </a:solidFill>
                 <a:latin typeface="Verdana"/>
               </a:rPr>
@@ -15406,7 +15406,7 @@
             <a:r>
               <a:rPr sz="2000" b="1" i="0">
                 <a:solidFill>
-                  <a:srgbClr val="166534"/>
+                  <a:srgbClr val="A5335F"/>
                 </a:solidFill>
                 <a:latin typeface="Verdana"/>
               </a:rPr>
@@ -15622,7 +15622,7 @@
             <a:r>
               <a:rPr sz="1300" b="1" i="0" spc="156">
                 <a:solidFill>
-                  <a:srgbClr val="166534"/>
+                  <a:srgbClr val="A5335F"/>
                 </a:solidFill>
                 <a:latin typeface="Verdana"/>
               </a:rPr>
@@ -15772,7 +15772,7 @@
             </a:avLst>
           </a:prstGeom>
           <a:solidFill>
-            <a:srgbClr val="E3F1E7"/>
+            <a:srgbClr val="FCE9F0"/>
           </a:solidFill>
           <a:ln>
             <a:noFill/>
@@ -15829,7 +15829,7 @@
             <a:r>
               <a:rPr sz="1500" b="1" i="0">
                 <a:solidFill>
-                  <a:srgbClr val="166534"/>
+                  <a:srgbClr val="A5335F"/>
                 </a:solidFill>
                 <a:latin typeface="Verdana"/>
               </a:rPr>
@@ -15940,7 +15940,7 @@
             </a:avLst>
           </a:prstGeom>
           <a:solidFill>
-            <a:srgbClr val="E3F1E7"/>
+            <a:srgbClr val="FCE9F0"/>
           </a:solidFill>
           <a:ln>
             <a:noFill/>
@@ -15997,7 +15997,7 @@
             <a:r>
               <a:rPr sz="1500" b="1" i="0">
                 <a:solidFill>
-                  <a:srgbClr val="166534"/>
+                  <a:srgbClr val="A5335F"/>
                 </a:solidFill>
                 <a:latin typeface="Verdana"/>
               </a:rPr>
@@ -16108,7 +16108,7 @@
             </a:avLst>
           </a:prstGeom>
           <a:solidFill>
-            <a:srgbClr val="E3F1E7"/>
+            <a:srgbClr val="FCE9F0"/>
           </a:solidFill>
           <a:ln>
             <a:noFill/>
@@ -16165,7 +16165,7 @@
             <a:r>
               <a:rPr sz="1500" b="1" i="0">
                 <a:solidFill>
-                  <a:srgbClr val="166534"/>
+                  <a:srgbClr val="A5335F"/>
                 </a:solidFill>
                 <a:latin typeface="Verdana"/>
               </a:rPr>
@@ -16276,7 +16276,7 @@
             </a:avLst>
           </a:prstGeom>
           <a:solidFill>
-            <a:srgbClr val="E3F1E7"/>
+            <a:srgbClr val="FCE9F0"/>
           </a:solidFill>
           <a:ln>
             <a:noFill/>
@@ -16333,7 +16333,7 @@
             <a:r>
               <a:rPr sz="1500" b="1" i="0">
                 <a:solidFill>
-                  <a:srgbClr val="166534"/>
+                  <a:srgbClr val="A5335F"/>
                 </a:solidFill>
                 <a:latin typeface="Verdana"/>
               </a:rPr>
@@ -16444,7 +16444,7 @@
             </a:avLst>
           </a:prstGeom>
           <a:solidFill>
-            <a:srgbClr val="E3F1E7"/>
+            <a:srgbClr val="FCE9F0"/>
           </a:solidFill>
           <a:ln>
             <a:noFill/>
@@ -16501,7 +16501,7 @@
             <a:r>
               <a:rPr sz="1500" b="1" i="0">
                 <a:solidFill>
-                  <a:srgbClr val="166534"/>
+                  <a:srgbClr val="A5335F"/>
                 </a:solidFill>
                 <a:latin typeface="Verdana"/>
               </a:rPr>
@@ -16612,7 +16612,7 @@
             </a:avLst>
           </a:prstGeom>
           <a:solidFill>
-            <a:srgbClr val="E3F1E7"/>
+            <a:srgbClr val="FCE9F0"/>
           </a:solidFill>
           <a:ln>
             <a:noFill/>
@@ -16669,7 +16669,7 @@
             <a:r>
               <a:rPr sz="1500" b="1" i="0">
                 <a:solidFill>
-                  <a:srgbClr val="166534"/>
+                  <a:srgbClr val="A5335F"/>
                 </a:solidFill>
                 <a:latin typeface="Verdana"/>
               </a:rPr>
